--- a/modulo-03/03.07 - Definindo Meta Objetos (Metadata Extensions)/03.07_Meta_objetos_do_Dicionário_e_do_CDS.pptx
+++ b/modulo-03/03.07 - Definindo Meta Objetos (Metadata Extensions)/03.07_Meta_objetos_do_Dicionário_e_do_CDS.pptx
@@ -1817,7 +1817,7 @@
                   <a:srgbClr val="8FA3C7"/>
                 </a:solidFill>
               </a:rPr>
-              <a:t>ABAP Moderno · Módulo 02 — Modelagem de Dados com Dicionário e CDS  ·  Aula 7 de 7 — Meta objetos</a:t>
+              <a:t>ABAP Moderno · Módulo 03 — Modelagem de Dados com Dicionário e CDS  ·  Aula 7 de 7 — Meta objetos</a:t>
             </a:r>
             <a:endParaRPr lang="en-US" sz="900" dirty="0"/>
           </a:p>
@@ -1963,7 +1963,7 @@
                   <a:srgbClr val="556B82"/>
                 </a:solidFill>
               </a:rPr>
-              <a:t>ABAP Moderno · Módulo 02 — Modelagem de Dados com Dicionário e CDS  ·  Aula 7 de 7 — Meta objetos</a:t>
+              <a:t>ABAP Moderno · Módulo 03 — Modelagem de Dados com Dicionário e CDS  ·  Aula 7 de 7 — Meta objetos</a:t>
             </a:r>
             <a:endParaRPr lang="en-US" sz="900" dirty="0"/>
           </a:p>
@@ -2394,7 +2394,7 @@
                   <a:srgbClr val="89D1FF"/>
                 </a:solidFill>
               </a:rPr>
-              <a:t>MÓDULO 02 · AULA 07 DE 07</a:t>
+              <a:t>MÓDULO 03 · AULA 07 DE 07</a:t>
             </a:r>
             <a:endParaRPr lang="en-US" sz="1400" dirty="0"/>
           </a:p>
@@ -2736,7 +2736,7 @@
                   <a:srgbClr val="8FA3C7"/>
                 </a:solidFill>
               </a:rPr>
-              <a:t>ABAP Moderno · Módulo 02 — Modelagem de Dados com Dicionário e CDS · Design System SAP Horizon</a:t>
+              <a:t>ABAP Moderno · Módulo 03 — Modelagem de Dados com Dicionário e CDS · Design System SAP Horizon</a:t>
             </a:r>
             <a:endParaRPr lang="en-US" sz="1100" dirty="0"/>
           </a:p>
@@ -3794,7 +3794,7 @@
                   <a:srgbClr val="89D1FF"/>
                 </a:solidFill>
               </a:rPr>
-              <a:t>AULA 02.07 · SEÇÃO 3</a:t>
+              <a:t>AULA 03.07 · SEÇÃO 3</a:t>
             </a:r>
             <a:endParaRPr lang="en-US" sz="1300" dirty="0"/>
           </a:p>
@@ -4317,7 +4317,7 @@
         <p:spPr>
           <a:xfrm>
             <a:off x="640080" y="1700784"/>
-            <a:ext cx="2775204" cy="292608"/>
+            <a:ext cx="2464308" cy="292608"/>
           </a:xfrm>
           <a:prstGeom prst="rect">
             <a:avLst/>
@@ -4337,7 +4337,7 @@
         <p:spPr>
           <a:xfrm>
             <a:off x="640080" y="1700784"/>
-            <a:ext cx="2775204" cy="27432"/>
+            <a:ext cx="2464308" cy="27432"/>
           </a:xfrm>
           <a:prstGeom prst="rect">
             <a:avLst/>
@@ -4357,7 +4357,7 @@
         <p:spPr>
           <a:xfrm>
             <a:off x="731520" y="1719072"/>
-            <a:ext cx="2592324" cy="274320"/>
+            <a:ext cx="2281428" cy="274320"/>
           </a:xfrm>
           <a:prstGeom prst="rect">
             <a:avLst/>
@@ -4378,7 +4378,7 @@
                   <a:srgbClr val="FFFFFF"/>
                 </a:solidFill>
               </a:rPr>
-              <a:t>zs4d430_c_employee.ddlx.asddlxs</a:t>
+              <a:t>zc_pc_item_app.ddlx.asddlxs</a:t>
             </a:r>
             <a:endParaRPr lang="en-US" sz="950" dirty="0"/>
           </a:p>
@@ -4414,7 +4414,7 @@
                   <a:srgbClr val="9DA5B4"/>
                 </a:solidFill>
               </a:rPr>
-              <a:t>ZS4D430_## › Core Data Services › Metadata Extensions</a:t>
+              <a:t>ZAVBS_PC_ESTOQUE › ZC_PC_ITEM_APP (trecho)</a:t>
             </a:r>
             <a:endParaRPr lang="en-US" sz="850" dirty="0"/>
           </a:p>
@@ -4660,6 +4660,26 @@
             </a:r>
             <a:endParaRPr lang="en-US" sz="1050" dirty="0"/>
           </a:p>
+          <a:p>
+            <a:pPr algn="r" indent="0" marL="0">
+              <a:lnSpc>
+                <a:spcPct val="105000"/>
+              </a:lnSpc>
+              <a:buNone/>
+            </a:pPr>
+            <a:r>
+              <a:rPr lang="en-US" sz="1050" dirty="0">
+                <a:solidFill>
+                  <a:srgbClr val="6E7681"/>
+                </a:solidFill>
+                <a:latin typeface="Courier New" pitchFamily="34" charset="0"/>
+                <a:ea typeface="Courier New" pitchFamily="34" charset="-122"/>
+                <a:cs typeface="Courier New" pitchFamily="34" charset="-120"/>
+              </a:rPr>
+              <a:t>12</a:t>
+            </a:r>
+            <a:endParaRPr lang="en-US" sz="1050" dirty="0"/>
+          </a:p>
         </p:txBody>
       </p:sp>
       <p:sp>
@@ -4795,7 +4815,7 @@
                 <a:ea typeface="Courier New" pitchFamily="34" charset="-122"/>
                 <a:cs typeface="Courier New" pitchFamily="34" charset="-120"/>
               </a:rPr>
-              <a:t>ZS4D430_C_Employee</a:t>
+              <a:t>ZC_PC_ITEM_APP</a:t>
             </a:r>
             <a:r>
               <a:rPr lang="en-US" sz="1050" dirty="0">
@@ -4868,7 +4888,7 @@
                 <a:ea typeface="Courier New" pitchFamily="34" charset="-122"/>
                 <a:cs typeface="Courier New" pitchFamily="34" charset="-120"/>
               </a:rPr>
-              <a:t>@EndUserText.label</a:t>
+              <a:t>@UI</a:t>
             </a:r>
             <a:r>
               <a:rPr lang="en-US" sz="1050" dirty="0">
@@ -4895,13 +4915,310 @@
             <a:r>
               <a:rPr lang="en-US" sz="1050" dirty="0">
                 <a:solidFill>
+                  <a:srgbClr val="CCCCCC"/>
+                </a:solidFill>
+                <a:latin typeface="Courier New" pitchFamily="34" charset="0"/>
+                <a:ea typeface="Courier New" pitchFamily="34" charset="-122"/>
+                <a:cs typeface="Courier New" pitchFamily="34" charset="-120"/>
+              </a:rPr>
+              <a:t>{</a:t>
+            </a:r>
+            <a:r>
+              <a:rPr lang="en-US" sz="1050" dirty="0">
+                <a:solidFill>
+                  <a:srgbClr val="CCCCCC"/>
+                </a:solidFill>
+                <a:latin typeface="Courier New" pitchFamily="34" charset="0"/>
+                <a:ea typeface="Courier New" pitchFamily="34" charset="-122"/>
+                <a:cs typeface="Courier New" pitchFamily="34" charset="-120"/>
+              </a:rPr>
+              <a:t> </a:t>
+            </a:r>
+            <a:r>
+              <a:rPr lang="en-US" sz="1050" dirty="0">
+                <a:solidFill>
+                  <a:srgbClr val="CCCCCC"/>
+                </a:solidFill>
+                <a:latin typeface="Courier New" pitchFamily="34" charset="0"/>
+                <a:ea typeface="Courier New" pitchFamily="34" charset="-122"/>
+                <a:cs typeface="Courier New" pitchFamily="34" charset="-120"/>
+              </a:rPr>
+              <a:t>lineItem</a:t>
+            </a:r>
+            <a:r>
+              <a:rPr lang="en-US" sz="1050" dirty="0">
+                <a:solidFill>
+                  <a:srgbClr val="CCCCCC"/>
+                </a:solidFill>
+                <a:latin typeface="Courier New" pitchFamily="34" charset="0"/>
+                <a:ea typeface="Courier New" pitchFamily="34" charset="-122"/>
+                <a:cs typeface="Courier New" pitchFamily="34" charset="-120"/>
+              </a:rPr>
+              <a:t>:</a:t>
+            </a:r>
+            <a:r>
+              <a:rPr lang="en-US" sz="1050" dirty="0">
+                <a:solidFill>
+                  <a:srgbClr val="CCCCCC"/>
+                </a:solidFill>
+                <a:latin typeface="Courier New" pitchFamily="34" charset="0"/>
+                <a:ea typeface="Courier New" pitchFamily="34" charset="-122"/>
+                <a:cs typeface="Courier New" pitchFamily="34" charset="-120"/>
+              </a:rPr>
+              <a:t>       </a:t>
+            </a:r>
+            <a:r>
+              <a:rPr lang="en-US" sz="1050" dirty="0">
+                <a:solidFill>
+                  <a:srgbClr val="CCCCCC"/>
+                </a:solidFill>
+                <a:latin typeface="Courier New" pitchFamily="34" charset="0"/>
+                <a:ea typeface="Courier New" pitchFamily="34" charset="-122"/>
+                <a:cs typeface="Courier New" pitchFamily="34" charset="-120"/>
+              </a:rPr>
+              <a:t>[</a:t>
+            </a:r>
+            <a:r>
+              <a:rPr lang="en-US" sz="1050" dirty="0">
+                <a:solidFill>
+                  <a:srgbClr val="CCCCCC"/>
+                </a:solidFill>
+                <a:latin typeface="Courier New" pitchFamily="34" charset="0"/>
+                <a:ea typeface="Courier New" pitchFamily="34" charset="-122"/>
+                <a:cs typeface="Courier New" pitchFamily="34" charset="-120"/>
+              </a:rPr>
+              <a:t>{</a:t>
+            </a:r>
+            <a:r>
+              <a:rPr lang="en-US" sz="1050" dirty="0">
+                <a:solidFill>
+                  <a:srgbClr val="CCCCCC"/>
+                </a:solidFill>
+                <a:latin typeface="Courier New" pitchFamily="34" charset="0"/>
+                <a:ea typeface="Courier New" pitchFamily="34" charset="-122"/>
+                <a:cs typeface="Courier New" pitchFamily="34" charset="-120"/>
+              </a:rPr>
+              <a:t> </a:t>
+            </a:r>
+            <a:r>
+              <a:rPr lang="en-US" sz="1050" dirty="0">
+                <a:solidFill>
+                  <a:srgbClr val="CCCCCC"/>
+                </a:solidFill>
+                <a:latin typeface="Courier New" pitchFamily="34" charset="0"/>
+                <a:ea typeface="Courier New" pitchFamily="34" charset="-122"/>
+                <a:cs typeface="Courier New" pitchFamily="34" charset="-120"/>
+              </a:rPr>
+              <a:t>position</a:t>
+            </a:r>
+            <a:r>
+              <a:rPr lang="en-US" sz="1050" dirty="0">
+                <a:solidFill>
+                  <a:srgbClr val="CCCCCC"/>
+                </a:solidFill>
+                <a:latin typeface="Courier New" pitchFamily="34" charset="0"/>
+                <a:ea typeface="Courier New" pitchFamily="34" charset="-122"/>
+                <a:cs typeface="Courier New" pitchFamily="34" charset="-120"/>
+              </a:rPr>
+              <a:t>:</a:t>
+            </a:r>
+            <a:r>
+              <a:rPr lang="en-US" sz="1050" dirty="0">
+                <a:solidFill>
+                  <a:srgbClr val="CCCCCC"/>
+                </a:solidFill>
+                <a:latin typeface="Courier New" pitchFamily="34" charset="0"/>
+                <a:ea typeface="Courier New" pitchFamily="34" charset="-122"/>
+                <a:cs typeface="Courier New" pitchFamily="34" charset="-120"/>
+              </a:rPr>
+              <a:t> </a:t>
+            </a:r>
+            <a:r>
+              <a:rPr lang="en-US" sz="1050" dirty="0">
+                <a:solidFill>
+                  <a:srgbClr val="B5CEA8"/>
+                </a:solidFill>
+                <a:latin typeface="Courier New" pitchFamily="34" charset="0"/>
+                <a:ea typeface="Courier New" pitchFamily="34" charset="-122"/>
+                <a:cs typeface="Courier New" pitchFamily="34" charset="-120"/>
+              </a:rPr>
+              <a:t>10</a:t>
+            </a:r>
+            <a:r>
+              <a:rPr lang="en-US" sz="1050" dirty="0">
+                <a:solidFill>
+                  <a:srgbClr val="CCCCCC"/>
+                </a:solidFill>
+                <a:latin typeface="Courier New" pitchFamily="34" charset="0"/>
+                <a:ea typeface="Courier New" pitchFamily="34" charset="-122"/>
+                <a:cs typeface="Courier New" pitchFamily="34" charset="-120"/>
+              </a:rPr>
+              <a:t>,</a:t>
+            </a:r>
+            <a:r>
+              <a:rPr lang="en-US" sz="1050" dirty="0">
+                <a:solidFill>
+                  <a:srgbClr val="CCCCCC"/>
+                </a:solidFill>
+                <a:latin typeface="Courier New" pitchFamily="34" charset="0"/>
+                <a:ea typeface="Courier New" pitchFamily="34" charset="-122"/>
+                <a:cs typeface="Courier New" pitchFamily="34" charset="-120"/>
+              </a:rPr>
+              <a:t> </a:t>
+            </a:r>
+            <a:r>
+              <a:rPr lang="en-US" sz="1050" dirty="0">
+                <a:solidFill>
+                  <a:srgbClr val="CCCCCC"/>
+                </a:solidFill>
+                <a:latin typeface="Courier New" pitchFamily="34" charset="0"/>
+                <a:ea typeface="Courier New" pitchFamily="34" charset="-122"/>
+                <a:cs typeface="Courier New" pitchFamily="34" charset="-120"/>
+              </a:rPr>
+              <a:t>label</a:t>
+            </a:r>
+            <a:r>
+              <a:rPr lang="en-US" sz="1050" dirty="0">
+                <a:solidFill>
+                  <a:srgbClr val="CCCCCC"/>
+                </a:solidFill>
+                <a:latin typeface="Courier New" pitchFamily="34" charset="0"/>
+                <a:ea typeface="Courier New" pitchFamily="34" charset="-122"/>
+                <a:cs typeface="Courier New" pitchFamily="34" charset="-120"/>
+              </a:rPr>
+              <a:t>:</a:t>
+            </a:r>
+            <a:r>
+              <a:rPr lang="en-US" sz="1050" dirty="0">
+                <a:solidFill>
+                  <a:srgbClr val="CCCCCC"/>
+                </a:solidFill>
+                <a:latin typeface="Courier New" pitchFamily="34" charset="0"/>
+                <a:ea typeface="Courier New" pitchFamily="34" charset="-122"/>
+                <a:cs typeface="Courier New" pitchFamily="34" charset="-120"/>
+              </a:rPr>
+              <a:t> </a:t>
+            </a:r>
+            <a:r>
+              <a:rPr lang="en-US" sz="1050" dirty="0">
+                <a:solidFill>
                   <a:srgbClr val="CE9178"/>
                 </a:solidFill>
                 <a:latin typeface="Courier New" pitchFamily="34" charset="0"/>
                 <a:ea typeface="Courier New" pitchFamily="34" charset="-122"/>
                 <a:cs typeface="Courier New" pitchFamily="34" charset="-120"/>
               </a:rPr>
-              <a:t>'Employee'</a:t>
+              <a:t>'SKU'</a:t>
+            </a:r>
+            <a:r>
+              <a:rPr lang="en-US" sz="1050" dirty="0">
+                <a:solidFill>
+                  <a:srgbClr val="CCCCCC"/>
+                </a:solidFill>
+                <a:latin typeface="Courier New" pitchFamily="34" charset="0"/>
+                <a:ea typeface="Courier New" pitchFamily="34" charset="-122"/>
+                <a:cs typeface="Courier New" pitchFamily="34" charset="-120"/>
+              </a:rPr>
+              <a:t>,</a:t>
+            </a:r>
+            <a:r>
+              <a:rPr lang="en-US" sz="1050" dirty="0">
+                <a:solidFill>
+                  <a:srgbClr val="CCCCCC"/>
+                </a:solidFill>
+                <a:latin typeface="Courier New" pitchFamily="34" charset="0"/>
+                <a:ea typeface="Courier New" pitchFamily="34" charset="-122"/>
+                <a:cs typeface="Courier New" pitchFamily="34" charset="-120"/>
+              </a:rPr>
+              <a:t> </a:t>
+            </a:r>
+            <a:r>
+              <a:rPr lang="en-US" sz="1050" dirty="0">
+                <a:solidFill>
+                  <a:srgbClr val="CCCCCC"/>
+                </a:solidFill>
+                <a:latin typeface="Courier New" pitchFamily="34" charset="0"/>
+                <a:ea typeface="Courier New" pitchFamily="34" charset="-122"/>
+                <a:cs typeface="Courier New" pitchFamily="34" charset="-120"/>
+              </a:rPr>
+              <a:t>importance</a:t>
+            </a:r>
+            <a:r>
+              <a:rPr lang="en-US" sz="1050" dirty="0">
+                <a:solidFill>
+                  <a:srgbClr val="CCCCCC"/>
+                </a:solidFill>
+                <a:latin typeface="Courier New" pitchFamily="34" charset="0"/>
+                <a:ea typeface="Courier New" pitchFamily="34" charset="-122"/>
+                <a:cs typeface="Courier New" pitchFamily="34" charset="-120"/>
+              </a:rPr>
+              <a:t>:</a:t>
+            </a:r>
+            <a:r>
+              <a:rPr lang="en-US" sz="1050" dirty="0">
+                <a:solidFill>
+                  <a:srgbClr val="CCCCCC"/>
+                </a:solidFill>
+                <a:latin typeface="Courier New" pitchFamily="34" charset="0"/>
+                <a:ea typeface="Courier New" pitchFamily="34" charset="-122"/>
+                <a:cs typeface="Courier New" pitchFamily="34" charset="-120"/>
+              </a:rPr>
+              <a:t> </a:t>
+            </a:r>
+            <a:r>
+              <a:rPr lang="en-US" sz="1050" dirty="0">
+                <a:solidFill>
+                  <a:srgbClr val="C586C0"/>
+                </a:solidFill>
+                <a:latin typeface="Courier New" pitchFamily="34" charset="0"/>
+                <a:ea typeface="Courier New" pitchFamily="34" charset="-122"/>
+                <a:cs typeface="Courier New" pitchFamily="34" charset="-120"/>
+              </a:rPr>
+              <a:t>#HIGH</a:t>
+            </a:r>
+            <a:r>
+              <a:rPr lang="en-US" sz="1050" dirty="0">
+                <a:solidFill>
+                  <a:srgbClr val="CCCCCC"/>
+                </a:solidFill>
+                <a:latin typeface="Courier New" pitchFamily="34" charset="0"/>
+                <a:ea typeface="Courier New" pitchFamily="34" charset="-122"/>
+                <a:cs typeface="Courier New" pitchFamily="34" charset="-120"/>
+              </a:rPr>
+              <a:t> </a:t>
+            </a:r>
+            <a:r>
+              <a:rPr lang="en-US" sz="1050" dirty="0">
+                <a:solidFill>
+                  <a:srgbClr val="CCCCCC"/>
+                </a:solidFill>
+                <a:latin typeface="Courier New" pitchFamily="34" charset="0"/>
+                <a:ea typeface="Courier New" pitchFamily="34" charset="-122"/>
+                <a:cs typeface="Courier New" pitchFamily="34" charset="-120"/>
+              </a:rPr>
+              <a:t>}</a:t>
+            </a:r>
+            <a:r>
+              <a:rPr lang="en-US" sz="1050" dirty="0">
+                <a:solidFill>
+                  <a:srgbClr val="CCCCCC"/>
+                </a:solidFill>
+                <a:latin typeface="Courier New" pitchFamily="34" charset="0"/>
+                <a:ea typeface="Courier New" pitchFamily="34" charset="-122"/>
+                <a:cs typeface="Courier New" pitchFamily="34" charset="-120"/>
+              </a:rPr>
+              <a:t>]</a:t>
+            </a:r>
+            <a:r>
+              <a:rPr lang="en-US" sz="1050" dirty="0">
+                <a:solidFill>
+                  <a:srgbClr val="CCCCCC"/>
+                </a:solidFill>
+                <a:latin typeface="Courier New" pitchFamily="34" charset="0"/>
+                <a:ea typeface="Courier New" pitchFamily="34" charset="-122"/>
+                <a:cs typeface="Courier New" pitchFamily="34" charset="-120"/>
+              </a:rPr>
+              <a:t>,</a:t>
             </a:r>
             <a:endParaRPr lang="en-US" sz="1050" dirty="0"/>
           </a:p>
@@ -4921,18 +5238,18 @@
                 <a:ea typeface="Courier New" pitchFamily="34" charset="-122"/>
                 <a:cs typeface="Courier New" pitchFamily="34" charset="-120"/>
               </a:rPr>
-              <a:t>  </a:t>
-            </a:r>
-            <a:r>
-              <a:rPr lang="en-US" sz="1050" dirty="0">
-                <a:solidFill>
-                  <a:srgbClr val="4EC9B0"/>
-                </a:solidFill>
-                <a:latin typeface="Courier New" pitchFamily="34" charset="0"/>
-                <a:ea typeface="Courier New" pitchFamily="34" charset="-122"/>
-                <a:cs typeface="Courier New" pitchFamily="34" charset="-120"/>
-              </a:rPr>
-              <a:t>@UI.lineItem</a:t>
+              <a:t>         </a:t>
+            </a:r>
+            <a:r>
+              <a:rPr lang="en-US" sz="1050" dirty="0">
+                <a:solidFill>
+                  <a:srgbClr val="CCCCCC"/>
+                </a:solidFill>
+                <a:latin typeface="Courier New" pitchFamily="34" charset="0"/>
+                <a:ea typeface="Courier New" pitchFamily="34" charset="-122"/>
+                <a:cs typeface="Courier New" pitchFamily="34" charset="-120"/>
+              </a:rPr>
+              <a:t>identification</a:t>
             </a:r>
             <a:r>
               <a:rPr lang="en-US" sz="1050" dirty="0">
@@ -4976,6 +5293,17 @@
                 <a:ea typeface="Courier New" pitchFamily="34" charset="-122"/>
                 <a:cs typeface="Courier New" pitchFamily="34" charset="-120"/>
               </a:rPr>
+              <a:t>{</a:t>
+            </a:r>
+            <a:r>
+              <a:rPr lang="en-US" sz="1050" dirty="0">
+                <a:solidFill>
+                  <a:srgbClr val="CCCCCC"/>
+                </a:solidFill>
+                <a:latin typeface="Courier New" pitchFamily="34" charset="0"/>
+                <a:ea typeface="Courier New" pitchFamily="34" charset="-122"/>
+                <a:cs typeface="Courier New" pitchFamily="34" charset="-120"/>
+              </a:rPr>
               <a:t> </a:t>
             </a:r>
             <a:r>
@@ -4987,7 +5315,18 @@
                 <a:ea typeface="Courier New" pitchFamily="34" charset="-122"/>
                 <a:cs typeface="Courier New" pitchFamily="34" charset="-120"/>
               </a:rPr>
-              <a:t>{</a:t>
+              <a:t>position</a:t>
+            </a:r>
+            <a:r>
+              <a:rPr lang="en-US" sz="1050" dirty="0">
+                <a:solidFill>
+                  <a:srgbClr val="CCCCCC"/>
+                </a:solidFill>
+                <a:latin typeface="Courier New" pitchFamily="34" charset="0"/>
+                <a:ea typeface="Courier New" pitchFamily="34" charset="-122"/>
+                <a:cs typeface="Courier New" pitchFamily="34" charset="-120"/>
+              </a:rPr>
+              <a:t>:</a:t>
             </a:r>
             <a:r>
               <a:rPr lang="en-US" sz="1050" dirty="0">
@@ -5003,13 +5342,46 @@
             <a:r>
               <a:rPr lang="en-US" sz="1050" dirty="0">
                 <a:solidFill>
-                  <a:srgbClr val="CCCCCC"/>
-                </a:solidFill>
-                <a:latin typeface="Courier New" pitchFamily="34" charset="0"/>
-                <a:ea typeface="Courier New" pitchFamily="34" charset="-122"/>
-                <a:cs typeface="Courier New" pitchFamily="34" charset="-120"/>
-              </a:rPr>
-              <a:t>position</a:t>
+                  <a:srgbClr val="B5CEA8"/>
+                </a:solidFill>
+                <a:latin typeface="Courier New" pitchFamily="34" charset="0"/>
+                <a:ea typeface="Courier New" pitchFamily="34" charset="-122"/>
+                <a:cs typeface="Courier New" pitchFamily="34" charset="-120"/>
+              </a:rPr>
+              <a:t>10</a:t>
+            </a:r>
+            <a:r>
+              <a:rPr lang="en-US" sz="1050" dirty="0">
+                <a:solidFill>
+                  <a:srgbClr val="CCCCCC"/>
+                </a:solidFill>
+                <a:latin typeface="Courier New" pitchFamily="34" charset="0"/>
+                <a:ea typeface="Courier New" pitchFamily="34" charset="-122"/>
+                <a:cs typeface="Courier New" pitchFamily="34" charset="-120"/>
+              </a:rPr>
+              <a:t>,</a:t>
+            </a:r>
+            <a:r>
+              <a:rPr lang="en-US" sz="1050" dirty="0">
+                <a:solidFill>
+                  <a:srgbClr val="CCCCCC"/>
+                </a:solidFill>
+                <a:latin typeface="Courier New" pitchFamily="34" charset="0"/>
+                <a:ea typeface="Courier New" pitchFamily="34" charset="-122"/>
+                <a:cs typeface="Courier New" pitchFamily="34" charset="-120"/>
+              </a:rPr>
+              <a:t> </a:t>
+            </a:r>
+            <a:r>
+              <a:rPr lang="en-US" sz="1050" dirty="0">
+                <a:solidFill>
+                  <a:srgbClr val="CCCCCC"/>
+                </a:solidFill>
+                <a:latin typeface="Courier New" pitchFamily="34" charset="0"/>
+                <a:ea typeface="Courier New" pitchFamily="34" charset="-122"/>
+                <a:cs typeface="Courier New" pitchFamily="34" charset="-120"/>
+              </a:rPr>
+              <a:t>label</a:t>
             </a:r>
             <a:r>
               <a:rPr lang="en-US" sz="1050" dirty="0">
@@ -5036,13 +5408,13 @@
             <a:r>
               <a:rPr lang="en-US" sz="1050" dirty="0">
                 <a:solidFill>
-                  <a:srgbClr val="B5CEA8"/>
-                </a:solidFill>
-                <a:latin typeface="Courier New" pitchFamily="34" charset="0"/>
-                <a:ea typeface="Courier New" pitchFamily="34" charset="-122"/>
-                <a:cs typeface="Courier New" pitchFamily="34" charset="-120"/>
-              </a:rPr>
-              <a:t>10</a:t>
+                  <a:srgbClr val="CE9178"/>
+                </a:solidFill>
+                <a:latin typeface="Courier New" pitchFamily="34" charset="0"/>
+                <a:ea typeface="Courier New" pitchFamily="34" charset="-122"/>
+                <a:cs typeface="Courier New" pitchFamily="34" charset="-120"/>
+              </a:rPr>
+              <a:t>'SKU (gerado automaticamente)'</a:t>
             </a:r>
             <a:r>
               <a:rPr lang="en-US" sz="1050" dirty="0">
@@ -5075,6 +5447,17 @@
                 <a:ea typeface="Courier New" pitchFamily="34" charset="-122"/>
                 <a:cs typeface="Courier New" pitchFamily="34" charset="-120"/>
               </a:rPr>
+              <a:t>]</a:t>
+            </a:r>
+            <a:r>
+              <a:rPr lang="en-US" sz="1050" dirty="0">
+                <a:solidFill>
+                  <a:srgbClr val="CCCCCC"/>
+                </a:solidFill>
+                <a:latin typeface="Courier New" pitchFamily="34" charset="0"/>
+                <a:ea typeface="Courier New" pitchFamily="34" charset="-122"/>
+                <a:cs typeface="Courier New" pitchFamily="34" charset="-120"/>
+              </a:rPr>
               <a:t> </a:t>
             </a:r>
             <a:r>
@@ -5086,7 +5469,7 @@
                 <a:ea typeface="Courier New" pitchFamily="34" charset="-122"/>
                 <a:cs typeface="Courier New" pitchFamily="34" charset="-120"/>
               </a:rPr>
-              <a:t>]</a:t>
+              <a:t>}</a:t>
             </a:r>
             <a:endParaRPr lang="en-US" sz="1050" dirty="0"/>
           </a:p>
@@ -5111,167 +5494,24 @@
             <a:r>
               <a:rPr lang="en-US" sz="1050" dirty="0">
                 <a:solidFill>
-                  <a:srgbClr val="4EC9B0"/>
-                </a:solidFill>
-                <a:latin typeface="Courier New" pitchFamily="34" charset="0"/>
-                <a:ea typeface="Courier New" pitchFamily="34" charset="-122"/>
-                <a:cs typeface="Courier New" pitchFamily="34" charset="-120"/>
-              </a:rPr>
-              <a:t>@UI.selectionField</a:t>
-            </a:r>
-            <a:r>
-              <a:rPr lang="en-US" sz="1050" dirty="0">
-                <a:solidFill>
-                  <a:srgbClr val="CCCCCC"/>
-                </a:solidFill>
-                <a:latin typeface="Courier New" pitchFamily="34" charset="0"/>
-                <a:ea typeface="Courier New" pitchFamily="34" charset="-122"/>
-                <a:cs typeface="Courier New" pitchFamily="34" charset="-120"/>
-              </a:rPr>
-              <a:t>:</a:t>
-            </a:r>
-            <a:r>
-              <a:rPr lang="en-US" sz="1050" dirty="0">
-                <a:solidFill>
-                  <a:srgbClr val="CCCCCC"/>
-                </a:solidFill>
-                <a:latin typeface="Courier New" pitchFamily="34" charset="0"/>
-                <a:ea typeface="Courier New" pitchFamily="34" charset="-122"/>
-                <a:cs typeface="Courier New" pitchFamily="34" charset="-120"/>
-              </a:rPr>
-              <a:t> </a:t>
-            </a:r>
-            <a:r>
-              <a:rPr lang="en-US" sz="1050" dirty="0">
-                <a:solidFill>
-                  <a:srgbClr val="CCCCCC"/>
-                </a:solidFill>
-                <a:latin typeface="Courier New" pitchFamily="34" charset="0"/>
-                <a:ea typeface="Courier New" pitchFamily="34" charset="-122"/>
-                <a:cs typeface="Courier New" pitchFamily="34" charset="-120"/>
-              </a:rPr>
-              <a:t>[</a:t>
-            </a:r>
-            <a:r>
-              <a:rPr lang="en-US" sz="1050" dirty="0">
-                <a:solidFill>
-                  <a:srgbClr val="CCCCCC"/>
-                </a:solidFill>
-                <a:latin typeface="Courier New" pitchFamily="34" charset="0"/>
-                <a:ea typeface="Courier New" pitchFamily="34" charset="-122"/>
-                <a:cs typeface="Courier New" pitchFamily="34" charset="-120"/>
-              </a:rPr>
-              <a:t> </a:t>
-            </a:r>
-            <a:r>
-              <a:rPr lang="en-US" sz="1050" dirty="0">
-                <a:solidFill>
-                  <a:srgbClr val="CCCCCC"/>
-                </a:solidFill>
-                <a:latin typeface="Courier New" pitchFamily="34" charset="0"/>
-                <a:ea typeface="Courier New" pitchFamily="34" charset="-122"/>
-                <a:cs typeface="Courier New" pitchFamily="34" charset="-120"/>
-              </a:rPr>
-              <a:t>{</a:t>
-            </a:r>
-            <a:r>
-              <a:rPr lang="en-US" sz="1050" dirty="0">
-                <a:solidFill>
-                  <a:srgbClr val="CCCCCC"/>
-                </a:solidFill>
-                <a:latin typeface="Courier New" pitchFamily="34" charset="0"/>
-                <a:ea typeface="Courier New" pitchFamily="34" charset="-122"/>
-                <a:cs typeface="Courier New" pitchFamily="34" charset="-120"/>
-              </a:rPr>
-              <a:t> </a:t>
-            </a:r>
-            <a:r>
-              <a:rPr lang="en-US" sz="1050" dirty="0">
-                <a:solidFill>
-                  <a:srgbClr val="CCCCCC"/>
-                </a:solidFill>
-                <a:latin typeface="Courier New" pitchFamily="34" charset="0"/>
-                <a:ea typeface="Courier New" pitchFamily="34" charset="-122"/>
-                <a:cs typeface="Courier New" pitchFamily="34" charset="-120"/>
-              </a:rPr>
-              <a:t>position</a:t>
-            </a:r>
-            <a:r>
-              <a:rPr lang="en-US" sz="1050" dirty="0">
-                <a:solidFill>
-                  <a:srgbClr val="CCCCCC"/>
-                </a:solidFill>
-                <a:latin typeface="Courier New" pitchFamily="34" charset="0"/>
-                <a:ea typeface="Courier New" pitchFamily="34" charset="-122"/>
-                <a:cs typeface="Courier New" pitchFamily="34" charset="-120"/>
-              </a:rPr>
-              <a:t>:</a:t>
-            </a:r>
-            <a:r>
-              <a:rPr lang="en-US" sz="1050" dirty="0">
-                <a:solidFill>
-                  <a:srgbClr val="CCCCCC"/>
-                </a:solidFill>
-                <a:latin typeface="Courier New" pitchFamily="34" charset="0"/>
-                <a:ea typeface="Courier New" pitchFamily="34" charset="-122"/>
-                <a:cs typeface="Courier New" pitchFamily="34" charset="-120"/>
-              </a:rPr>
-              <a:t> </a:t>
-            </a:r>
-            <a:r>
-              <a:rPr lang="en-US" sz="1050" dirty="0">
-                <a:solidFill>
-                  <a:srgbClr val="B5CEA8"/>
-                </a:solidFill>
-                <a:latin typeface="Courier New" pitchFamily="34" charset="0"/>
-                <a:ea typeface="Courier New" pitchFamily="34" charset="-122"/>
-                <a:cs typeface="Courier New" pitchFamily="34" charset="-120"/>
-              </a:rPr>
-              <a:t>10</a:t>
-            </a:r>
-            <a:r>
-              <a:rPr lang="en-US" sz="1050" dirty="0">
-                <a:solidFill>
-                  <a:srgbClr val="CCCCCC"/>
-                </a:solidFill>
-                <a:latin typeface="Courier New" pitchFamily="34" charset="0"/>
-                <a:ea typeface="Courier New" pitchFamily="34" charset="-122"/>
-                <a:cs typeface="Courier New" pitchFamily="34" charset="-120"/>
-              </a:rPr>
-              <a:t> </a:t>
-            </a:r>
-            <a:r>
-              <a:rPr lang="en-US" sz="1050" dirty="0">
-                <a:solidFill>
-                  <a:srgbClr val="CCCCCC"/>
-                </a:solidFill>
-                <a:latin typeface="Courier New" pitchFamily="34" charset="0"/>
-                <a:ea typeface="Courier New" pitchFamily="34" charset="-122"/>
-                <a:cs typeface="Courier New" pitchFamily="34" charset="-120"/>
-              </a:rPr>
-              <a:t>}</a:t>
-            </a:r>
-            <a:r>
-              <a:rPr lang="en-US" sz="1050" dirty="0">
-                <a:solidFill>
-                  <a:srgbClr val="CCCCCC"/>
-                </a:solidFill>
-                <a:latin typeface="Courier New" pitchFamily="34" charset="0"/>
-                <a:ea typeface="Courier New" pitchFamily="34" charset="-122"/>
-                <a:cs typeface="Courier New" pitchFamily="34" charset="-120"/>
-              </a:rPr>
-              <a:t> </a:t>
-            </a:r>
-            <a:r>
-              <a:rPr lang="en-US" sz="1050" dirty="0">
-                <a:solidFill>
-                  <a:srgbClr val="CCCCCC"/>
-                </a:solidFill>
-                <a:latin typeface="Courier New" pitchFamily="34" charset="0"/>
-                <a:ea typeface="Courier New" pitchFamily="34" charset="-122"/>
-                <a:cs typeface="Courier New" pitchFamily="34" charset="-120"/>
-              </a:rPr>
-              <a:t>]</a:t>
+                  <a:srgbClr val="CCCCCC"/>
+                </a:solidFill>
+                <a:latin typeface="Courier New" pitchFamily="34" charset="0"/>
+                <a:ea typeface="Courier New" pitchFamily="34" charset="-122"/>
+                <a:cs typeface="Courier New" pitchFamily="34" charset="-120"/>
+              </a:rPr>
+              <a:t>Sku</a:t>
+            </a:r>
+            <a:r>
+              <a:rPr lang="en-US" sz="1050" dirty="0">
+                <a:solidFill>
+                  <a:srgbClr val="CCCCCC"/>
+                </a:solidFill>
+                <a:latin typeface="Courier New" pitchFamily="34" charset="0"/>
+                <a:ea typeface="Courier New" pitchFamily="34" charset="-122"/>
+                <a:cs typeface="Courier New" pitchFamily="34" charset="-120"/>
+              </a:rPr>
+              <a:t>;</a:t>
             </a:r>
             <a:endParaRPr lang="en-US" sz="1050" dirty="0"/>
           </a:p>
@@ -5285,35 +5525,13 @@
             <a:r>
               <a:rPr lang="en-US" sz="1050" dirty="0">
                 <a:solidFill>
-                  <a:srgbClr val="CCCCCC"/>
-                </a:solidFill>
-                <a:latin typeface="Courier New" pitchFamily="34" charset="0"/>
-                <a:ea typeface="Courier New" pitchFamily="34" charset="-122"/>
-                <a:cs typeface="Courier New" pitchFamily="34" charset="-120"/>
-              </a:rPr>
-              <a:t>  </a:t>
-            </a:r>
-            <a:r>
-              <a:rPr lang="en-US" sz="1050" dirty="0">
-                <a:solidFill>
-                  <a:srgbClr val="CCCCCC"/>
-                </a:solidFill>
-                <a:latin typeface="Courier New" pitchFamily="34" charset="0"/>
-                <a:ea typeface="Courier New" pitchFamily="34" charset="-122"/>
-                <a:cs typeface="Courier New" pitchFamily="34" charset="-120"/>
-              </a:rPr>
-              <a:t>EmployeeId</a:t>
-            </a:r>
-            <a:r>
-              <a:rPr lang="en-US" sz="1050" dirty="0">
-                <a:solidFill>
-                  <a:srgbClr val="CCCCCC"/>
-                </a:solidFill>
-                <a:latin typeface="Courier New" pitchFamily="34" charset="0"/>
-                <a:ea typeface="Courier New" pitchFamily="34" charset="-122"/>
-                <a:cs typeface="Courier New" pitchFamily="34" charset="-120"/>
-              </a:rPr>
-              <a:t>;</a:t>
+                  <a:srgbClr val="000000"/>
+                </a:solidFill>
+                <a:latin typeface="Courier New" pitchFamily="34" charset="0"/>
+                <a:ea typeface="Courier New" pitchFamily="34" charset="-122"/>
+                <a:cs typeface="Courier New" pitchFamily="34" charset="-120"/>
+              </a:rPr>
+              <a:t> </a:t>
             </a:r>
             <a:endParaRPr lang="en-US" sz="1050" dirty="0"/>
           </a:p>
@@ -5327,13 +5545,288 @@
             <a:r>
               <a:rPr lang="en-US" sz="1050" dirty="0">
                 <a:solidFill>
-                  <a:srgbClr val="000000"/>
+                  <a:srgbClr val="CCCCCC"/>
+                </a:solidFill>
+                <a:latin typeface="Courier New" pitchFamily="34" charset="0"/>
+                <a:ea typeface="Courier New" pitchFamily="34" charset="-122"/>
+                <a:cs typeface="Courier New" pitchFamily="34" charset="-120"/>
+              </a:rPr>
+              <a:t>  </a:t>
+            </a:r>
+            <a:r>
+              <a:rPr lang="en-US" sz="1050" dirty="0">
+                <a:solidFill>
+                  <a:srgbClr val="4EC9B0"/>
+                </a:solidFill>
+                <a:latin typeface="Courier New" pitchFamily="34" charset="0"/>
+                <a:ea typeface="Courier New" pitchFamily="34" charset="-122"/>
+                <a:cs typeface="Courier New" pitchFamily="34" charset="-120"/>
+              </a:rPr>
+              <a:t>@UI</a:t>
+            </a:r>
+            <a:r>
+              <a:rPr lang="en-US" sz="1050" dirty="0">
+                <a:solidFill>
+                  <a:srgbClr val="CCCCCC"/>
+                </a:solidFill>
+                <a:latin typeface="Courier New" pitchFamily="34" charset="0"/>
+                <a:ea typeface="Courier New" pitchFamily="34" charset="-122"/>
+                <a:cs typeface="Courier New" pitchFamily="34" charset="-120"/>
+              </a:rPr>
+              <a:t>:</a:t>
+            </a:r>
+            <a:r>
+              <a:rPr lang="en-US" sz="1050" dirty="0">
+                <a:solidFill>
+                  <a:srgbClr val="CCCCCC"/>
                 </a:solidFill>
                 <a:latin typeface="Courier New" pitchFamily="34" charset="0"/>
                 <a:ea typeface="Courier New" pitchFamily="34" charset="-122"/>
                 <a:cs typeface="Courier New" pitchFamily="34" charset="-120"/>
               </a:rPr>
               <a:t> </a:t>
+            </a:r>
+            <a:r>
+              <a:rPr lang="en-US" sz="1050" dirty="0">
+                <a:solidFill>
+                  <a:srgbClr val="CCCCCC"/>
+                </a:solidFill>
+                <a:latin typeface="Courier New" pitchFamily="34" charset="0"/>
+                <a:ea typeface="Courier New" pitchFamily="34" charset="-122"/>
+                <a:cs typeface="Courier New" pitchFamily="34" charset="-120"/>
+              </a:rPr>
+              <a:t>{</a:t>
+            </a:r>
+            <a:r>
+              <a:rPr lang="en-US" sz="1050" dirty="0">
+                <a:solidFill>
+                  <a:srgbClr val="CCCCCC"/>
+                </a:solidFill>
+                <a:latin typeface="Courier New" pitchFamily="34" charset="0"/>
+                <a:ea typeface="Courier New" pitchFamily="34" charset="-122"/>
+                <a:cs typeface="Courier New" pitchFamily="34" charset="-120"/>
+              </a:rPr>
+              <a:t> </a:t>
+            </a:r>
+            <a:r>
+              <a:rPr lang="en-US" sz="1050" dirty="0">
+                <a:solidFill>
+                  <a:srgbClr val="CCCCCC"/>
+                </a:solidFill>
+                <a:latin typeface="Courier New" pitchFamily="34" charset="0"/>
+                <a:ea typeface="Courier New" pitchFamily="34" charset="-122"/>
+                <a:cs typeface="Courier New" pitchFamily="34" charset="-120"/>
+              </a:rPr>
+              <a:t>lineItem</a:t>
+            </a:r>
+            <a:r>
+              <a:rPr lang="en-US" sz="1050" dirty="0">
+                <a:solidFill>
+                  <a:srgbClr val="CCCCCC"/>
+                </a:solidFill>
+                <a:latin typeface="Courier New" pitchFamily="34" charset="0"/>
+                <a:ea typeface="Courier New" pitchFamily="34" charset="-122"/>
+                <a:cs typeface="Courier New" pitchFamily="34" charset="-120"/>
+              </a:rPr>
+              <a:t>:</a:t>
+            </a:r>
+            <a:r>
+              <a:rPr lang="en-US" sz="1050" dirty="0">
+                <a:solidFill>
+                  <a:srgbClr val="CCCCCC"/>
+                </a:solidFill>
+                <a:latin typeface="Courier New" pitchFamily="34" charset="0"/>
+                <a:ea typeface="Courier New" pitchFamily="34" charset="-122"/>
+                <a:cs typeface="Courier New" pitchFamily="34" charset="-120"/>
+              </a:rPr>
+              <a:t>       </a:t>
+            </a:r>
+            <a:r>
+              <a:rPr lang="en-US" sz="1050" dirty="0">
+                <a:solidFill>
+                  <a:srgbClr val="CCCCCC"/>
+                </a:solidFill>
+                <a:latin typeface="Courier New" pitchFamily="34" charset="0"/>
+                <a:ea typeface="Courier New" pitchFamily="34" charset="-122"/>
+                <a:cs typeface="Courier New" pitchFamily="34" charset="-120"/>
+              </a:rPr>
+              <a:t>[</a:t>
+            </a:r>
+            <a:r>
+              <a:rPr lang="en-US" sz="1050" dirty="0">
+                <a:solidFill>
+                  <a:srgbClr val="CCCCCC"/>
+                </a:solidFill>
+                <a:latin typeface="Courier New" pitchFamily="34" charset="0"/>
+                <a:ea typeface="Courier New" pitchFamily="34" charset="-122"/>
+                <a:cs typeface="Courier New" pitchFamily="34" charset="-120"/>
+              </a:rPr>
+              <a:t>{</a:t>
+            </a:r>
+            <a:r>
+              <a:rPr lang="en-US" sz="1050" dirty="0">
+                <a:solidFill>
+                  <a:srgbClr val="CCCCCC"/>
+                </a:solidFill>
+                <a:latin typeface="Courier New" pitchFamily="34" charset="0"/>
+                <a:ea typeface="Courier New" pitchFamily="34" charset="-122"/>
+                <a:cs typeface="Courier New" pitchFamily="34" charset="-120"/>
+              </a:rPr>
+              <a:t> </a:t>
+            </a:r>
+            <a:r>
+              <a:rPr lang="en-US" sz="1050" dirty="0">
+                <a:solidFill>
+                  <a:srgbClr val="CCCCCC"/>
+                </a:solidFill>
+                <a:latin typeface="Courier New" pitchFamily="34" charset="0"/>
+                <a:ea typeface="Courier New" pitchFamily="34" charset="-122"/>
+                <a:cs typeface="Courier New" pitchFamily="34" charset="-120"/>
+              </a:rPr>
+              <a:t>position</a:t>
+            </a:r>
+            <a:r>
+              <a:rPr lang="en-US" sz="1050" dirty="0">
+                <a:solidFill>
+                  <a:srgbClr val="CCCCCC"/>
+                </a:solidFill>
+                <a:latin typeface="Courier New" pitchFamily="34" charset="0"/>
+                <a:ea typeface="Courier New" pitchFamily="34" charset="-122"/>
+                <a:cs typeface="Courier New" pitchFamily="34" charset="-120"/>
+              </a:rPr>
+              <a:t>:</a:t>
+            </a:r>
+            <a:r>
+              <a:rPr lang="en-US" sz="1050" dirty="0">
+                <a:solidFill>
+                  <a:srgbClr val="CCCCCC"/>
+                </a:solidFill>
+                <a:latin typeface="Courier New" pitchFamily="34" charset="0"/>
+                <a:ea typeface="Courier New" pitchFamily="34" charset="-122"/>
+                <a:cs typeface="Courier New" pitchFamily="34" charset="-120"/>
+              </a:rPr>
+              <a:t> </a:t>
+            </a:r>
+            <a:r>
+              <a:rPr lang="en-US" sz="1050" dirty="0">
+                <a:solidFill>
+                  <a:srgbClr val="B5CEA8"/>
+                </a:solidFill>
+                <a:latin typeface="Courier New" pitchFamily="34" charset="0"/>
+                <a:ea typeface="Courier New" pitchFamily="34" charset="-122"/>
+                <a:cs typeface="Courier New" pitchFamily="34" charset="-120"/>
+              </a:rPr>
+              <a:t>20</a:t>
+            </a:r>
+            <a:r>
+              <a:rPr lang="en-US" sz="1050" dirty="0">
+                <a:solidFill>
+                  <a:srgbClr val="CCCCCC"/>
+                </a:solidFill>
+                <a:latin typeface="Courier New" pitchFamily="34" charset="0"/>
+                <a:ea typeface="Courier New" pitchFamily="34" charset="-122"/>
+                <a:cs typeface="Courier New" pitchFamily="34" charset="-120"/>
+              </a:rPr>
+              <a:t>,</a:t>
+            </a:r>
+            <a:r>
+              <a:rPr lang="en-US" sz="1050" dirty="0">
+                <a:solidFill>
+                  <a:srgbClr val="CCCCCC"/>
+                </a:solidFill>
+                <a:latin typeface="Courier New" pitchFamily="34" charset="0"/>
+                <a:ea typeface="Courier New" pitchFamily="34" charset="-122"/>
+                <a:cs typeface="Courier New" pitchFamily="34" charset="-120"/>
+              </a:rPr>
+              <a:t> </a:t>
+            </a:r>
+            <a:r>
+              <a:rPr lang="en-US" sz="1050" dirty="0">
+                <a:solidFill>
+                  <a:srgbClr val="CCCCCC"/>
+                </a:solidFill>
+                <a:latin typeface="Courier New" pitchFamily="34" charset="0"/>
+                <a:ea typeface="Courier New" pitchFamily="34" charset="-122"/>
+                <a:cs typeface="Courier New" pitchFamily="34" charset="-120"/>
+              </a:rPr>
+              <a:t>label</a:t>
+            </a:r>
+            <a:r>
+              <a:rPr lang="en-US" sz="1050" dirty="0">
+                <a:solidFill>
+                  <a:srgbClr val="CCCCCC"/>
+                </a:solidFill>
+                <a:latin typeface="Courier New" pitchFamily="34" charset="0"/>
+                <a:ea typeface="Courier New" pitchFamily="34" charset="-122"/>
+                <a:cs typeface="Courier New" pitchFamily="34" charset="-120"/>
+              </a:rPr>
+              <a:t>:</a:t>
+            </a:r>
+            <a:r>
+              <a:rPr lang="en-US" sz="1050" dirty="0">
+                <a:solidFill>
+                  <a:srgbClr val="CCCCCC"/>
+                </a:solidFill>
+                <a:latin typeface="Courier New" pitchFamily="34" charset="0"/>
+                <a:ea typeface="Courier New" pitchFamily="34" charset="-122"/>
+                <a:cs typeface="Courier New" pitchFamily="34" charset="-120"/>
+              </a:rPr>
+              <a:t> </a:t>
+            </a:r>
+            <a:r>
+              <a:rPr lang="en-US" sz="1050" dirty="0">
+                <a:solidFill>
+                  <a:srgbClr val="CE9178"/>
+                </a:solidFill>
+                <a:latin typeface="Courier New" pitchFamily="34" charset="0"/>
+                <a:ea typeface="Courier New" pitchFamily="34" charset="-122"/>
+                <a:cs typeface="Courier New" pitchFamily="34" charset="-120"/>
+              </a:rPr>
+              <a:t>'Nome'</a:t>
+            </a:r>
+            <a:r>
+              <a:rPr lang="en-US" sz="1050" dirty="0">
+                <a:solidFill>
+                  <a:srgbClr val="CCCCCC"/>
+                </a:solidFill>
+                <a:latin typeface="Courier New" pitchFamily="34" charset="0"/>
+                <a:ea typeface="Courier New" pitchFamily="34" charset="-122"/>
+                <a:cs typeface="Courier New" pitchFamily="34" charset="-120"/>
+              </a:rPr>
+              <a:t> </a:t>
+            </a:r>
+            <a:r>
+              <a:rPr lang="en-US" sz="1050" dirty="0">
+                <a:solidFill>
+                  <a:srgbClr val="CCCCCC"/>
+                </a:solidFill>
+                <a:latin typeface="Courier New" pitchFamily="34" charset="0"/>
+                <a:ea typeface="Courier New" pitchFamily="34" charset="-122"/>
+                <a:cs typeface="Courier New" pitchFamily="34" charset="-120"/>
+              </a:rPr>
+              <a:t>}</a:t>
+            </a:r>
+            <a:r>
+              <a:rPr lang="en-US" sz="1050" dirty="0">
+                <a:solidFill>
+                  <a:srgbClr val="CCCCCC"/>
+                </a:solidFill>
+                <a:latin typeface="Courier New" pitchFamily="34" charset="0"/>
+                <a:ea typeface="Courier New" pitchFamily="34" charset="-122"/>
+                <a:cs typeface="Courier New" pitchFamily="34" charset="-120"/>
+              </a:rPr>
+              <a:t>]</a:t>
+            </a:r>
+            <a:r>
+              <a:rPr lang="en-US" sz="1050" dirty="0">
+                <a:solidFill>
+                  <a:srgbClr val="CCCCCC"/>
+                </a:solidFill>
+                <a:latin typeface="Courier New" pitchFamily="34" charset="0"/>
+                <a:ea typeface="Courier New" pitchFamily="34" charset="-122"/>
+                <a:cs typeface="Courier New" pitchFamily="34" charset="-120"/>
+              </a:rPr>
+              <a:t>,</a:t>
             </a:r>
             <a:endParaRPr lang="en-US" sz="1050" dirty="0"/>
           </a:p>
@@ -5353,18 +5846,18 @@
                 <a:ea typeface="Courier New" pitchFamily="34" charset="-122"/>
                 <a:cs typeface="Courier New" pitchFamily="34" charset="-120"/>
               </a:rPr>
-              <a:t>  </a:t>
-            </a:r>
-            <a:r>
-              <a:rPr lang="en-US" sz="1050" dirty="0">
-                <a:solidFill>
-                  <a:srgbClr val="4EC9B0"/>
-                </a:solidFill>
-                <a:latin typeface="Courier New" pitchFamily="34" charset="0"/>
-                <a:ea typeface="Courier New" pitchFamily="34" charset="-122"/>
-                <a:cs typeface="Courier New" pitchFamily="34" charset="-120"/>
-              </a:rPr>
-              <a:t>@UI.lineItem</a:t>
+              <a:t>         </a:t>
+            </a:r>
+            <a:r>
+              <a:rPr lang="en-US" sz="1050" dirty="0">
+                <a:solidFill>
+                  <a:srgbClr val="CCCCCC"/>
+                </a:solidFill>
+                <a:latin typeface="Courier New" pitchFamily="34" charset="0"/>
+                <a:ea typeface="Courier New" pitchFamily="34" charset="-122"/>
+                <a:cs typeface="Courier New" pitchFamily="34" charset="-120"/>
+              </a:rPr>
+              <a:t>selectionField</a:t>
             </a:r>
             <a:r>
               <a:rPr lang="en-US" sz="1050" dirty="0">
@@ -5408,6 +5901,17 @@
                 <a:ea typeface="Courier New" pitchFamily="34" charset="-122"/>
                 <a:cs typeface="Courier New" pitchFamily="34" charset="-120"/>
               </a:rPr>
+              <a:t>{</a:t>
+            </a:r>
+            <a:r>
+              <a:rPr lang="en-US" sz="1050" dirty="0">
+                <a:solidFill>
+                  <a:srgbClr val="CCCCCC"/>
+                </a:solidFill>
+                <a:latin typeface="Courier New" pitchFamily="34" charset="0"/>
+                <a:ea typeface="Courier New" pitchFamily="34" charset="-122"/>
+                <a:cs typeface="Courier New" pitchFamily="34" charset="-120"/>
+              </a:rPr>
               <a:t> </a:t>
             </a:r>
             <a:r>
@@ -5419,7 +5923,18 @@
                 <a:ea typeface="Courier New" pitchFamily="34" charset="-122"/>
                 <a:cs typeface="Courier New" pitchFamily="34" charset="-120"/>
               </a:rPr>
-              <a:t>{</a:t>
+              <a:t>position</a:t>
+            </a:r>
+            <a:r>
+              <a:rPr lang="en-US" sz="1050" dirty="0">
+                <a:solidFill>
+                  <a:srgbClr val="CCCCCC"/>
+                </a:solidFill>
+                <a:latin typeface="Courier New" pitchFamily="34" charset="0"/>
+                <a:ea typeface="Courier New" pitchFamily="34" charset="-122"/>
+                <a:cs typeface="Courier New" pitchFamily="34" charset="-120"/>
+              </a:rPr>
+              <a:t>:</a:t>
             </a:r>
             <a:r>
               <a:rPr lang="en-US" sz="1050" dirty="0">
@@ -5435,24 +5950,13 @@
             <a:r>
               <a:rPr lang="en-US" sz="1050" dirty="0">
                 <a:solidFill>
-                  <a:srgbClr val="CCCCCC"/>
-                </a:solidFill>
-                <a:latin typeface="Courier New" pitchFamily="34" charset="0"/>
-                <a:ea typeface="Courier New" pitchFamily="34" charset="-122"/>
-                <a:cs typeface="Courier New" pitchFamily="34" charset="-120"/>
-              </a:rPr>
-              <a:t>position</a:t>
-            </a:r>
-            <a:r>
-              <a:rPr lang="en-US" sz="1050" dirty="0">
-                <a:solidFill>
-                  <a:srgbClr val="CCCCCC"/>
-                </a:solidFill>
-                <a:latin typeface="Courier New" pitchFamily="34" charset="0"/>
-                <a:ea typeface="Courier New" pitchFamily="34" charset="-122"/>
-                <a:cs typeface="Courier New" pitchFamily="34" charset="-120"/>
-              </a:rPr>
-              <a:t>:</a:t>
+                  <a:srgbClr val="B5CEA8"/>
+                </a:solidFill>
+                <a:latin typeface="Courier New" pitchFamily="34" charset="0"/>
+                <a:ea typeface="Courier New" pitchFamily="34" charset="-122"/>
+                <a:cs typeface="Courier New" pitchFamily="34" charset="-120"/>
+              </a:rPr>
+              <a:t>20</a:t>
             </a:r>
             <a:r>
               <a:rPr lang="en-US" sz="1050" dirty="0">
@@ -5468,13 +5972,24 @@
             <a:r>
               <a:rPr lang="en-US" sz="1050" dirty="0">
                 <a:solidFill>
-                  <a:srgbClr val="B5CEA8"/>
-                </a:solidFill>
-                <a:latin typeface="Courier New" pitchFamily="34" charset="0"/>
-                <a:ea typeface="Courier New" pitchFamily="34" charset="-122"/>
-                <a:cs typeface="Courier New" pitchFamily="34" charset="-120"/>
-              </a:rPr>
-              <a:t>20</a:t>
+                  <a:srgbClr val="CCCCCC"/>
+                </a:solidFill>
+                <a:latin typeface="Courier New" pitchFamily="34" charset="0"/>
+                <a:ea typeface="Courier New" pitchFamily="34" charset="-122"/>
+                <a:cs typeface="Courier New" pitchFamily="34" charset="-120"/>
+              </a:rPr>
+              <a:t>}</a:t>
+            </a:r>
+            <a:r>
+              <a:rPr lang="en-US" sz="1050" dirty="0">
+                <a:solidFill>
+                  <a:srgbClr val="CCCCCC"/>
+                </a:solidFill>
+                <a:latin typeface="Courier New" pitchFamily="34" charset="0"/>
+                <a:ea typeface="Courier New" pitchFamily="34" charset="-122"/>
+                <a:cs typeface="Courier New" pitchFamily="34" charset="-120"/>
+              </a:rPr>
+              <a:t>]</a:t>
             </a:r>
             <a:r>
               <a:rPr lang="en-US" sz="1050" dirty="0">
@@ -5497,28 +6012,6 @@
                 <a:cs typeface="Courier New" pitchFamily="34" charset="-120"/>
               </a:rPr>
               <a:t>}</a:t>
-            </a:r>
-            <a:r>
-              <a:rPr lang="en-US" sz="1050" dirty="0">
-                <a:solidFill>
-                  <a:srgbClr val="CCCCCC"/>
-                </a:solidFill>
-                <a:latin typeface="Courier New" pitchFamily="34" charset="0"/>
-                <a:ea typeface="Courier New" pitchFamily="34" charset="-122"/>
-                <a:cs typeface="Courier New" pitchFamily="34" charset="-120"/>
-              </a:rPr>
-              <a:t> </a:t>
-            </a:r>
-            <a:r>
-              <a:rPr lang="en-US" sz="1050" dirty="0">
-                <a:solidFill>
-                  <a:srgbClr val="CCCCCC"/>
-                </a:solidFill>
-                <a:latin typeface="Courier New" pitchFamily="34" charset="0"/>
-                <a:ea typeface="Courier New" pitchFamily="34" charset="-122"/>
-                <a:cs typeface="Courier New" pitchFamily="34" charset="-120"/>
-              </a:rPr>
-              <a:t>]</a:t>
             </a:r>
             <a:endParaRPr lang="en-US" sz="1050" dirty="0"/>
           </a:p>
@@ -5543,13 +6036,77 @@
             <a:r>
               <a:rPr lang="en-US" sz="1050" dirty="0">
                 <a:solidFill>
-                  <a:srgbClr val="CCCCCC"/>
-                </a:solidFill>
-                <a:latin typeface="Courier New" pitchFamily="34" charset="0"/>
-                <a:ea typeface="Courier New" pitchFamily="34" charset="-122"/>
-                <a:cs typeface="Courier New" pitchFamily="34" charset="-120"/>
-              </a:rPr>
-              <a:t>LastName</a:t>
+                  <a:srgbClr val="4EC9B0"/>
+                </a:solidFill>
+                <a:latin typeface="Courier New" pitchFamily="34" charset="0"/>
+                <a:ea typeface="Courier New" pitchFamily="34" charset="-122"/>
+                <a:cs typeface="Courier New" pitchFamily="34" charset="-120"/>
+              </a:rPr>
+              <a:t>@EndUserText.label</a:t>
+            </a:r>
+            <a:r>
+              <a:rPr lang="en-US" sz="1050" dirty="0">
+                <a:solidFill>
+                  <a:srgbClr val="CCCCCC"/>
+                </a:solidFill>
+                <a:latin typeface="Courier New" pitchFamily="34" charset="0"/>
+                <a:ea typeface="Courier New" pitchFamily="34" charset="-122"/>
+                <a:cs typeface="Courier New" pitchFamily="34" charset="-120"/>
+              </a:rPr>
+              <a:t>:</a:t>
+            </a:r>
+            <a:r>
+              <a:rPr lang="en-US" sz="1050" dirty="0">
+                <a:solidFill>
+                  <a:srgbClr val="CCCCCC"/>
+                </a:solidFill>
+                <a:latin typeface="Courier New" pitchFamily="34" charset="0"/>
+                <a:ea typeface="Courier New" pitchFamily="34" charset="-122"/>
+                <a:cs typeface="Courier New" pitchFamily="34" charset="-120"/>
+              </a:rPr>
+              <a:t> </a:t>
+            </a:r>
+            <a:r>
+              <a:rPr lang="en-US" sz="1050" dirty="0">
+                <a:solidFill>
+                  <a:srgbClr val="CE9178"/>
+                </a:solidFill>
+                <a:latin typeface="Courier New" pitchFamily="34" charset="0"/>
+                <a:ea typeface="Courier New" pitchFamily="34" charset="-122"/>
+                <a:cs typeface="Courier New" pitchFamily="34" charset="-120"/>
+              </a:rPr>
+              <a:t>'Nome'</a:t>
+            </a:r>
+            <a:endParaRPr lang="en-US" sz="1050" dirty="0"/>
+          </a:p>
+          <a:p>
+            <a:pPr indent="0" marL="0">
+              <a:lnSpc>
+                <a:spcPct val="105000"/>
+              </a:lnSpc>
+              <a:buNone/>
+            </a:pPr>
+            <a:r>
+              <a:rPr lang="en-US" sz="1050" dirty="0">
+                <a:solidFill>
+                  <a:srgbClr val="CCCCCC"/>
+                </a:solidFill>
+                <a:latin typeface="Courier New" pitchFamily="34" charset="0"/>
+                <a:ea typeface="Courier New" pitchFamily="34" charset="-122"/>
+                <a:cs typeface="Courier New" pitchFamily="34" charset="-120"/>
+              </a:rPr>
+              <a:t>  </a:t>
+            </a:r>
+            <a:r>
+              <a:rPr lang="en-US" sz="1050" dirty="0">
+                <a:solidFill>
+                  <a:srgbClr val="CCCCCC"/>
+                </a:solidFill>
+                <a:latin typeface="Courier New" pitchFamily="34" charset="0"/>
+                <a:ea typeface="Courier New" pitchFamily="34" charset="-122"/>
+                <a:cs typeface="Courier New" pitchFamily="34" charset="-120"/>
+              </a:rPr>
+              <a:t>Nome</a:t>
             </a:r>
             <a:r>
               <a:rPr lang="en-US" sz="1050" dirty="0">
@@ -7185,7 +7742,7 @@
                   <a:srgbClr val="FFFFFF"/>
                 </a:solidFill>
               </a:rPr>
-              <a:t>O que aprendemos na aula 02.07</a:t>
+              <a:t>O que aprendemos na aula 03.07</a:t>
             </a:r>
             <a:endParaRPr lang="en-US" sz="3200" dirty="0"/>
           </a:p>
@@ -7761,7 +8318,7 @@
                   <a:srgbClr val="FFFFFF"/>
                 </a:solidFill>
               </a:rPr>
-              <a:t>Módulo 05 (ordem recomendada): extensibilidade Clean Core no S/4HANA.</a:t>
+              <a:t>Módulo 04: extensibilidade Clean Core no S/4HANA.</a:t>
             </a:r>
             <a:endParaRPr lang="en-US" sz="1500" dirty="0"/>
           </a:p>
@@ -8030,7 +8587,7 @@
                   <a:srgbClr val="1D2D3E"/>
                 </a:solidFill>
               </a:rPr>
-              <a:t>Módulo 02 em 7 aulas: Dicionário e CDS</a:t>
+              <a:t>Módulo 03 em 7 aulas: Dicionário e CDS</a:t>
             </a:r>
             <a:endParaRPr lang="en-US" sz="2800" dirty="0"/>
           </a:p>
@@ -9288,7 +9845,7 @@
                   <a:srgbClr val="1D2D3E"/>
                 </a:solidFill>
               </a:rPr>
-              <a:t>protegemos a leitura dos funcionários por departamento, estendemos objetos sem alterá-los e separamos as anotações de UI da view.</a:t>
+              <a:t>protegemos a leitura dos clientes por UF, estendemos o item de estoque sem alterá-lo e separamos as anotações de UI da view, como o projeto Pedidos de Compras faz em todos os apps.</a:t>
             </a:r>
             <a:endParaRPr lang="en-US" sz="1400" dirty="0"/>
           </a:p>
@@ -9310,7 +9867,7 @@
         </p:blipFill>
         <p:spPr>
           <a:xfrm>
-            <a:off x="2636444" y="1847088"/>
+            <a:off x="5455768" y="3858768"/>
             <a:ext cx="347472" cy="347472"/>
           </a:xfrm>
           <a:prstGeom prst="rect">
@@ -9334,7 +9891,7 @@
         </p:blipFill>
         <p:spPr>
           <a:xfrm>
-            <a:off x="5455768" y="1847088"/>
+            <a:off x="2636444" y="1847088"/>
             <a:ext cx="347472" cy="347472"/>
           </a:xfrm>
           <a:prstGeom prst="rect">
@@ -9358,7 +9915,7 @@
         </p:blipFill>
         <p:spPr>
           <a:xfrm>
-            <a:off x="8275091" y="1847088"/>
+            <a:off x="11094415" y="1847088"/>
             <a:ext cx="347472" cy="347472"/>
           </a:xfrm>
           <a:prstGeom prst="rect">
@@ -9382,7 +9939,7 @@
         </p:blipFill>
         <p:spPr>
           <a:xfrm>
-            <a:off x="11094415" y="1847088"/>
+            <a:off x="5455768" y="1847088"/>
             <a:ext cx="347472" cy="347472"/>
           </a:xfrm>
           <a:prstGeom prst="rect">
@@ -9406,7 +9963,7 @@
         </p:blipFill>
         <p:spPr>
           <a:xfrm>
-            <a:off x="5455768" y="3858768"/>
+            <a:off x="2636444" y="3858768"/>
             <a:ext cx="347472" cy="347472"/>
           </a:xfrm>
           <a:prstGeom prst="rect">
@@ -9430,7 +9987,7 @@
         </p:blipFill>
         <p:spPr>
           <a:xfrm>
-            <a:off x="2636444" y="3858768"/>
+            <a:off x="8275091" y="1847088"/>
             <a:ext cx="347472" cy="347472"/>
           </a:xfrm>
           <a:prstGeom prst="rect">
@@ -10083,7 +10640,7 @@
         </p:blipFill>
         <p:spPr>
           <a:xfrm>
-            <a:off x="4624730" y="3417951"/>
+            <a:off x="850392" y="3417951"/>
             <a:ext cx="256032" cy="256032"/>
           </a:xfrm>
           <a:prstGeom prst="rect">
@@ -10107,7 +10664,7 @@
         </p:blipFill>
         <p:spPr>
           <a:xfrm>
-            <a:off x="850392" y="3417951"/>
+            <a:off x="4624730" y="3417951"/>
             <a:ext cx="256032" cy="256032"/>
           </a:xfrm>
           <a:prstGeom prst="rect">
@@ -10261,7 +10818,7 @@
                   <a:srgbClr val="89D1FF"/>
                 </a:solidFill>
               </a:rPr>
-              <a:t>AULA 02.07 · SEÇÃO 1</a:t>
+              <a:t>AULA 03.07 · SEÇÃO 1</a:t>
             </a:r>
             <a:endParaRPr lang="en-US" sz="1300" dirty="0"/>
           </a:p>
@@ -11487,7 +12044,7 @@
         </p:blipFill>
         <p:spPr>
           <a:xfrm>
-            <a:off x="8270519" y="3616452"/>
+            <a:off x="11094415" y="3616452"/>
             <a:ext cx="329184" cy="329184"/>
           </a:xfrm>
           <a:prstGeom prst="rect">
@@ -11511,7 +12068,7 @@
         </p:blipFill>
         <p:spPr>
           <a:xfrm>
-            <a:off x="11094415" y="3616452"/>
+            <a:off x="8270519" y="3616452"/>
             <a:ext cx="329184" cy="329184"/>
           </a:xfrm>
           <a:prstGeom prst="rect">
@@ -11659,7 +12216,7 @@
                   <a:srgbClr val="1D2D3E"/>
                 </a:solidFill>
               </a:rPr>
-              <a:t>Só os departamentos que o usuário pode ler</a:t>
+              <a:t>Só os clientes das UFs que o usuário pode ler</a:t>
             </a:r>
             <a:endParaRPr lang="en-US" sz="2800" dirty="0"/>
           </a:p>
@@ -11723,7 +12280,7 @@
         <p:spPr>
           <a:xfrm>
             <a:off x="640080" y="1700784"/>
-            <a:ext cx="2697480" cy="292608"/>
+            <a:ext cx="2619756" cy="292608"/>
           </a:xfrm>
           <a:prstGeom prst="rect">
             <a:avLst/>
@@ -11743,7 +12300,7 @@
         <p:spPr>
           <a:xfrm>
             <a:off x="640080" y="1700784"/>
-            <a:ext cx="2697480" cy="27432"/>
+            <a:ext cx="2619756" cy="27432"/>
           </a:xfrm>
           <a:prstGeom prst="rect">
             <a:avLst/>
@@ -11763,7 +12320,7 @@
         <p:spPr>
           <a:xfrm>
             <a:off x="731520" y="1719072"/>
-            <a:ext cx="2514600" cy="274320"/>
+            <a:ext cx="2436876" cy="274320"/>
           </a:xfrm>
           <a:prstGeom prst="rect">
             <a:avLst/>
@@ -11784,7 +12341,7 @@
                   <a:srgbClr val="FFFFFF"/>
                 </a:solidFill>
               </a:rPr>
-              <a:t>zs4d430_r_employee.dcls.asdcls</a:t>
+              <a:t>zc_pc_cliente_app.dcls.asdcls</a:t>
             </a:r>
             <a:endParaRPr lang="en-US" sz="950" dirty="0"/>
           </a:p>
@@ -11820,7 +12377,7 @@
                   <a:srgbClr val="9DA5B4"/>
                 </a:solidFill>
               </a:rPr>
-              <a:t>ZS4D430_## › Core Data Services › Access Controls</a:t>
+              <a:t>Roteiro opcional de DCL do projeto (abap/README.md, seções 7.5 e 7.6)</a:t>
             </a:r>
             <a:endParaRPr lang="en-US" sz="850" dirty="0"/>
           </a:p>
@@ -12177,7 +12734,7 @@
                 <a:ea typeface="Courier New" pitchFamily="34" charset="-122"/>
                 <a:cs typeface="Courier New" pitchFamily="34" charset="-120"/>
               </a:rPr>
-              <a:t>'Access to employee data'</a:t>
+              <a:t>'Acesso aos clientes'</a:t>
             </a:r>
             <a:endParaRPr lang="en-US" sz="1050" dirty="0"/>
           </a:p>
@@ -12294,7 +12851,7 @@
                 <a:ea typeface="Courier New" pitchFamily="34" charset="-122"/>
                 <a:cs typeface="Courier New" pitchFamily="34" charset="-120"/>
               </a:rPr>
-              <a:t>ZS4D430_R_EMPLOYEE</a:t>
+              <a:t>ZC_PC_CLIENTE_APP</a:t>
             </a:r>
             <a:r>
               <a:rPr lang="en-US" sz="1050" dirty="0">
@@ -12413,7 +12970,7 @@
                 <a:ea typeface="Courier New" pitchFamily="34" charset="-122"/>
                 <a:cs typeface="Courier New" pitchFamily="34" charset="-120"/>
               </a:rPr>
-              <a:t>ZS4D430_R_Employee</a:t>
+              <a:t>ZC_PC_CLIENTE_APP</a:t>
             </a:r>
             <a:endParaRPr lang="en-US" sz="1050" dirty="0"/>
           </a:p>
@@ -12488,7 +13045,7 @@
                 <a:ea typeface="Courier New" pitchFamily="34" charset="-122"/>
                 <a:cs typeface="Courier New" pitchFamily="34" charset="-120"/>
               </a:rPr>
-              <a:t>DepartmentId</a:t>
+              <a:t>UfPrincipal</a:t>
             </a:r>
             <a:r>
               <a:rPr lang="en-US" sz="1050" dirty="0">
@@ -12609,7 +13166,7 @@
                 <a:ea typeface="Courier New" pitchFamily="34" charset="-122"/>
                 <a:cs typeface="Courier New" pitchFamily="34" charset="-120"/>
               </a:rPr>
-              <a:t>Z00DPMNT</a:t>
+              <a:t>ZPC_ADMIN</a:t>
             </a:r>
             <a:r>
               <a:rPr lang="en-US" sz="1050" dirty="0">
@@ -12640,18 +13197,18 @@
                 <a:ea typeface="Courier New" pitchFamily="34" charset="-122"/>
                 <a:cs typeface="Courier New" pitchFamily="34" charset="-120"/>
               </a:rPr>
-              <a:t>                                               </a:t>
-            </a:r>
-            <a:r>
-              <a:rPr lang="en-US" sz="1050" dirty="0">
-                <a:solidFill>
-                  <a:srgbClr val="CCCCCC"/>
-                </a:solidFill>
-                <a:latin typeface="Courier New" pitchFamily="34" charset="0"/>
-                <a:ea typeface="Courier New" pitchFamily="34" charset="-122"/>
-                <a:cs typeface="Courier New" pitchFamily="34" charset="-120"/>
-              </a:rPr>
-              <a:t>Z00DEPMENT</a:t>
+              <a:t>                                              </a:t>
+            </a:r>
+            <a:r>
+              <a:rPr lang="en-US" sz="1050" dirty="0">
+                <a:solidFill>
+                  <a:srgbClr val="CCCCCC"/>
+                </a:solidFill>
+                <a:latin typeface="Courier New" pitchFamily="34" charset="0"/>
+                <a:ea typeface="Courier New" pitchFamily="34" charset="-122"/>
+                <a:cs typeface="Courier New" pitchFamily="34" charset="-120"/>
+              </a:rPr>
+              <a:t>ZPC_UF</a:t>
             </a:r>
             <a:r>
               <a:rPr lang="en-US" sz="1050" dirty="0">
@@ -12682,7 +13239,7 @@
                 <a:ea typeface="Courier New" pitchFamily="34" charset="-122"/>
                 <a:cs typeface="Courier New" pitchFamily="34" charset="-120"/>
               </a:rPr>
-              <a:t>                                               </a:t>
+              <a:t>                                              </a:t>
             </a:r>
             <a:r>
               <a:rPr lang="en-US" sz="1050" dirty="0">
@@ -12874,7 +13431,7 @@
                 <a:ea typeface="Courier New" pitchFamily="34" charset="-122"/>
                 <a:cs typeface="Courier New" pitchFamily="34" charset="-120"/>
               </a:rPr>
-              <a:t>ZS4D430_C_EMPLOYEE</a:t>
+              <a:t>ZC_PC_CLIENTE_ANALISE</a:t>
             </a:r>
             <a:r>
               <a:rPr lang="en-US" sz="1050" dirty="0">
@@ -12993,7 +13550,7 @@
                 <a:ea typeface="Courier New" pitchFamily="34" charset="-122"/>
                 <a:cs typeface="Courier New" pitchFamily="34" charset="-120"/>
               </a:rPr>
-              <a:t>ZS4D430_C_Employee</a:t>
+              <a:t>ZC_PC_CLIENTE_ANALISE</a:t>
             </a:r>
             <a:endParaRPr lang="en-US" sz="1050" dirty="0"/>
           </a:p>
@@ -13134,7 +13691,7 @@
                 <a:ea typeface="Courier New" pitchFamily="34" charset="-122"/>
                 <a:cs typeface="Courier New" pitchFamily="34" charset="-120"/>
               </a:rPr>
-              <a:t>ZS4D430_R_Employee</a:t>
+              <a:t>ZC_PC_CLIENTE_APP</a:t>
             </a:r>
             <a:r>
               <a:rPr lang="en-US" sz="1050" dirty="0">
@@ -13423,7 +13980,7 @@
                   <a:srgbClr val="556B82"/>
                 </a:solidFill>
               </a:rPr>
-              <a:t>Compara o elemento com as autorizações do usuário no objeto </a:t>
+              <a:t>Compara </a:t>
             </a:r>
             <a:r>
               <a:rPr lang="en-US" sz="1050" dirty="0">
@@ -13434,7 +13991,45 @@
                 <a:ea typeface="Courier New" pitchFamily="34" charset="-122"/>
                 <a:cs typeface="Courier New" pitchFamily="34" charset="-120"/>
               </a:rPr>
-              <a:t>Z00DPMNT</a:t>
+              <a:t>UfPrincipal</a:t>
+            </a:r>
+            <a:r>
+              <a:rPr lang="en-US" sz="1050" dirty="0">
+                <a:solidFill>
+                  <a:srgbClr val="556B82"/>
+                </a:solidFill>
+              </a:rPr>
+              <a:t> com o campo </a:t>
+            </a:r>
+            <a:r>
+              <a:rPr lang="en-US" sz="1050" dirty="0">
+                <a:solidFill>
+                  <a:srgbClr val="0064D9"/>
+                </a:solidFill>
+                <a:latin typeface="Courier New" pitchFamily="34" charset="0"/>
+                <a:ea typeface="Courier New" pitchFamily="34" charset="-122"/>
+                <a:cs typeface="Courier New" pitchFamily="34" charset="-120"/>
+              </a:rPr>
+              <a:t>ZPC_UF</a:t>
+            </a:r>
+            <a:r>
+              <a:rPr lang="en-US" sz="1050" dirty="0">
+                <a:solidFill>
+                  <a:srgbClr val="556B82"/>
+                </a:solidFill>
+              </a:rPr>
+              <a:t> das autorizações do usuário em </a:t>
+            </a:r>
+            <a:r>
+              <a:rPr lang="en-US" sz="1050" dirty="0">
+                <a:solidFill>
+                  <a:srgbClr val="0064D9"/>
+                </a:solidFill>
+                <a:latin typeface="Courier New" pitchFamily="34" charset="0"/>
+                <a:ea typeface="Courier New" pitchFamily="34" charset="-122"/>
+                <a:cs typeface="Courier New" pitchFamily="34" charset="-120"/>
+              </a:rPr>
+              <a:t>ZPC_ADMIN</a:t>
             </a:r>
             <a:r>
               <a:rPr lang="en-US" sz="1050" dirty="0">
@@ -14680,7 +15275,7 @@
                   <a:srgbClr val="89D1FF"/>
                 </a:solidFill>
               </a:rPr>
-              <a:t>AULA 02.07 · SEÇÃO 2</a:t>
+              <a:t>AULA 03.07 · SEÇÃO 2</a:t>
             </a:r>
             <a:endParaRPr lang="en-US" sz="1300" dirty="0"/>
           </a:p>
@@ -15277,7 +15872,7 @@
         <p:spPr>
           <a:xfrm>
             <a:off x="640080" y="2084832"/>
-            <a:ext cx="1842516" cy="292608"/>
+            <a:ext cx="1764792" cy="292608"/>
           </a:xfrm>
           <a:prstGeom prst="rect">
             <a:avLst/>
@@ -15297,7 +15892,7 @@
         <p:spPr>
           <a:xfrm>
             <a:off x="640080" y="2084832"/>
-            <a:ext cx="1842516" cy="27432"/>
+            <a:ext cx="1764792" cy="27432"/>
           </a:xfrm>
           <a:prstGeom prst="rect">
             <a:avLst/>
@@ -15317,7 +15912,7 @@
         <p:spPr>
           <a:xfrm>
             <a:off x="731520" y="2103120"/>
-            <a:ext cx="1659636" cy="274320"/>
+            <a:ext cx="1581912" cy="274320"/>
           </a:xfrm>
           <a:prstGeom prst="rect">
             <a:avLst/>
@@ -15338,7 +15933,7 @@
                   <a:srgbClr val="FFFFFF"/>
                 </a:solidFill>
               </a:rPr>
-              <a:t>z00_ext_agency.tabl</a:t>
+              <a:t>zzpc_ext_item.tabl</a:t>
             </a:r>
             <a:endParaRPr lang="en-US" sz="950" dirty="0"/>
           </a:p>
@@ -15546,7 +16141,7 @@
                 <a:ea typeface="Courier New" pitchFamily="34" charset="-122"/>
                 <a:cs typeface="Courier New" pitchFamily="34" charset="-120"/>
               </a:rPr>
-              <a:t>'Agency extension'</a:t>
+              <a:t>'Extensão do item de estoque'</a:t>
             </a:r>
             <a:endParaRPr lang="en-US" sz="1050" dirty="0"/>
           </a:p>
@@ -15674,7 +16269,7 @@
                 <a:ea typeface="Courier New" pitchFamily="34" charset="-122"/>
                 <a:cs typeface="Courier New" pitchFamily="34" charset="-120"/>
               </a:rPr>
-              <a:t>/dmo/agency</a:t>
+              <a:t>zta_pc_item</a:t>
             </a:r>
             <a:r>
               <a:rPr lang="en-US" sz="1050" dirty="0">
@@ -15718,7 +16313,7 @@
                 <a:ea typeface="Courier New" pitchFamily="34" charset="-122"/>
                 <a:cs typeface="Courier New" pitchFamily="34" charset="-120"/>
               </a:rPr>
-              <a:t>z00_ext_agency</a:t>
+              <a:t>zzpc_ext_item</a:t>
             </a:r>
             <a:r>
               <a:rPr lang="en-US" sz="1050" dirty="0">
@@ -15771,7 +16366,7 @@
                 <a:ea typeface="Courier New" pitchFamily="34" charset="-122"/>
                 <a:cs typeface="Courier New" pitchFamily="34" charset="-120"/>
               </a:rPr>
-              <a:t>zzcategoryzag</a:t>
+              <a:t>zzgarantia_meses</a:t>
             </a:r>
             <a:r>
               <a:rPr lang="en-US" sz="1050" dirty="0">
@@ -15831,46 +16426,13 @@
             <a:r>
               <a:rPr lang="en-US" sz="1050" dirty="0">
                 <a:solidFill>
-                  <a:srgbClr val="DCDCAA"/>
-                </a:solidFill>
-                <a:latin typeface="Courier New" pitchFamily="34" charset="0"/>
-                <a:ea typeface="Courier New" pitchFamily="34" charset="-122"/>
-                <a:cs typeface="Courier New" pitchFamily="34" charset="-120"/>
-              </a:rPr>
-              <a:t>char</a:t>
-            </a:r>
-            <a:r>
-              <a:rPr lang="en-US" sz="1050" dirty="0">
-                <a:solidFill>
-                  <a:srgbClr val="CCCCCC"/>
-                </a:solidFill>
-                <a:latin typeface="Courier New" pitchFamily="34" charset="0"/>
-                <a:ea typeface="Courier New" pitchFamily="34" charset="-122"/>
-                <a:cs typeface="Courier New" pitchFamily="34" charset="-120"/>
-              </a:rPr>
-              <a:t>(</a:t>
-            </a:r>
-            <a:r>
-              <a:rPr lang="en-US" sz="1050" dirty="0">
-                <a:solidFill>
-                  <a:srgbClr val="B5CEA8"/>
-                </a:solidFill>
-                <a:latin typeface="Courier New" pitchFamily="34" charset="0"/>
-                <a:ea typeface="Courier New" pitchFamily="34" charset="-122"/>
-                <a:cs typeface="Courier New" pitchFamily="34" charset="-120"/>
-              </a:rPr>
-              <a:t>1</a:t>
-            </a:r>
-            <a:r>
-              <a:rPr lang="en-US" sz="1050" dirty="0">
-                <a:solidFill>
-                  <a:srgbClr val="CCCCCC"/>
-                </a:solidFill>
-                <a:latin typeface="Courier New" pitchFamily="34" charset="0"/>
-                <a:ea typeface="Courier New" pitchFamily="34" charset="-122"/>
-                <a:cs typeface="Courier New" pitchFamily="34" charset="-120"/>
-              </a:rPr>
-              <a:t>)</a:t>
+                  <a:srgbClr val="CCCCCC"/>
+                </a:solidFill>
+                <a:latin typeface="Courier New" pitchFamily="34" charset="0"/>
+                <a:ea typeface="Courier New" pitchFamily="34" charset="-122"/>
+                <a:cs typeface="Courier New" pitchFamily="34" charset="-120"/>
+              </a:rPr>
+              <a:t>int1</a:t>
             </a:r>
             <a:r>
               <a:rPr lang="en-US" sz="1050" dirty="0">
@@ -15937,7 +16499,7 @@
                   <a:srgbClr val="556B82"/>
                 </a:solidFill>
               </a:rPr>
-              <a:t>Ao ativar, o campo passa a existir na tabela do banco. Campos </a:t>
+              <a:t>Ao ativar, o campo passa a existir na tabela. Para isso, </a:t>
             </a:r>
             <a:r>
               <a:rPr lang="en-US" sz="1200" dirty="0">
@@ -15948,7 +16510,7 @@
                 <a:ea typeface="Courier New" pitchFamily="34" charset="-122"/>
                 <a:cs typeface="Courier New" pitchFamily="34" charset="-120"/>
               </a:rPr>
-              <a:t>ZZ</a:t>
+              <a:t>zta_pc_item</a:t>
             </a:r>
             <a:r>
               <a:rPr lang="en-US" sz="1200" dirty="0">
@@ -15956,7 +16518,7 @@
                   <a:srgbClr val="556B82"/>
                 </a:solidFill>
               </a:rPr>
-              <a:t>/</a:t>
+              <a:t> precisaria trocar </a:t>
             </a:r>
             <a:r>
               <a:rPr lang="en-US" sz="1200" dirty="0">
@@ -15967,7 +16529,7 @@
                 <a:ea typeface="Courier New" pitchFamily="34" charset="-122"/>
                 <a:cs typeface="Courier New" pitchFamily="34" charset="-120"/>
               </a:rPr>
-              <a:t>YY</a:t>
+              <a:t>#NOT_EXTENSIBLE</a:t>
             </a:r>
             <a:r>
               <a:rPr lang="en-US" sz="1200" dirty="0">
@@ -15975,7 +16537,7 @@
                   <a:srgbClr val="556B82"/>
                 </a:solidFill>
               </a:rPr>
-              <a:t> nunca colidem com campos entregues pela SAP.</a:t>
+              <a:t> por uma categoria extensível.</a:t>
             </a:r>
             <a:endParaRPr lang="en-US" sz="1400" dirty="0"/>
           </a:p>
@@ -16097,7 +16659,7 @@
         <p:spPr>
           <a:xfrm>
             <a:off x="6324448" y="2084832"/>
-            <a:ext cx="1687068" cy="292608"/>
+            <a:ext cx="1531620" cy="292608"/>
           </a:xfrm>
           <a:prstGeom prst="rect">
             <a:avLst/>
@@ -16117,7 +16679,7 @@
         <p:spPr>
           <a:xfrm>
             <a:off x="6324448" y="2084832"/>
-            <a:ext cx="1687068" cy="27432"/>
+            <a:ext cx="1531620" cy="27432"/>
           </a:xfrm>
           <a:prstGeom prst="rect">
             <a:avLst/>
@@ -16137,7 +16699,7 @@
         <p:spPr>
           <a:xfrm>
             <a:off x="6415888" y="2103120"/>
-            <a:ext cx="1504188" cy="274320"/>
+            <a:ext cx="1348740" cy="274320"/>
           </a:xfrm>
           <a:prstGeom prst="rect">
             <a:avLst/>
@@ -16158,7 +16720,7 @@
                   <a:srgbClr val="FFFFFF"/>
                 </a:solidFill>
               </a:rPr>
-              <a:t>z00_x_agency.ddls</a:t>
+              <a:t>zx_pc_item.ddls</a:t>
             </a:r>
             <a:endParaRPr lang="en-US" sz="950" dirty="0"/>
           </a:p>
@@ -16368,7 +16930,7 @@
                 <a:ea typeface="Courier New" pitchFamily="34" charset="-122"/>
                 <a:cs typeface="Courier New" pitchFamily="34" charset="-120"/>
               </a:rPr>
-              <a:t>/DMO/E_Agency</a:t>
+              <a:t>ZR_PC_ITEM</a:t>
             </a:r>
             <a:r>
               <a:rPr lang="en-US" sz="1050" dirty="0">
@@ -16441,7 +17003,7 @@
                 <a:ea typeface="Courier New" pitchFamily="34" charset="-122"/>
                 <a:cs typeface="Courier New" pitchFamily="34" charset="-120"/>
               </a:rPr>
-              <a:t>Agency</a:t>
+              <a:t>zta_pc_item</a:t>
             </a:r>
             <a:r>
               <a:rPr lang="en-US" sz="1050" dirty="0">
@@ -16463,7 +17025,7 @@
                 <a:ea typeface="Courier New" pitchFamily="34" charset="-122"/>
                 <a:cs typeface="Courier New" pitchFamily="34" charset="-120"/>
               </a:rPr>
-              <a:t>zzcategoryzag</a:t>
+              <a:t>zzgarantia_meses</a:t>
             </a:r>
             <a:r>
               <a:rPr lang="en-US" sz="1050" dirty="0">
@@ -16507,7 +17069,7 @@
                 <a:ea typeface="Courier New" pitchFamily="34" charset="-122"/>
                 <a:cs typeface="Courier New" pitchFamily="34" charset="-120"/>
               </a:rPr>
-              <a:t>ZZCategoryZAG</a:t>
+              <a:t>ZZGarantiaMeses</a:t>
             </a:r>
             <a:endParaRPr lang="en-US" sz="1050" dirty="0"/>
           </a:p>
@@ -16563,7 +17125,7 @@
                   <a:srgbClr val="556B82"/>
                 </a:solidFill>
               </a:rPr>
-              <a:t>Endereça os campos pelo </a:t>
+              <a:t>Endereça os campos pela </a:t>
             </a:r>
             <a:r>
               <a:rPr lang="en-US" sz="1200" b="1" dirty="0">
@@ -16571,7 +17133,7 @@
                   <a:srgbClr val="556B82"/>
                 </a:solidFill>
               </a:rPr>
-              <a:t>alias da fonte</a:t>
+              <a:t>fonte</a:t>
             </a:r>
             <a:r>
               <a:rPr lang="en-US" sz="1200" dirty="0">
@@ -16579,7 +17141,45 @@
                   <a:srgbClr val="556B82"/>
                 </a:solidFill>
               </a:rPr>
-              <a:t> da view original e pode adicionar e expor novas associações.</a:t>
+              <a:t> da view original e pode adicionar e expor novas associações. Campos </a:t>
+            </a:r>
+            <a:r>
+              <a:rPr lang="en-US" sz="1200" dirty="0">
+                <a:solidFill>
+                  <a:srgbClr val="0064D9"/>
+                </a:solidFill>
+                <a:latin typeface="Courier New" pitchFamily="34" charset="0"/>
+                <a:ea typeface="Courier New" pitchFamily="34" charset="-122"/>
+                <a:cs typeface="Courier New" pitchFamily="34" charset="-120"/>
+              </a:rPr>
+              <a:t>ZZ</a:t>
+            </a:r>
+            <a:r>
+              <a:rPr lang="en-US" sz="1200" dirty="0">
+                <a:solidFill>
+                  <a:srgbClr val="556B82"/>
+                </a:solidFill>
+              </a:rPr>
+              <a:t>/</a:t>
+            </a:r>
+            <a:r>
+              <a:rPr lang="en-US" sz="1200" dirty="0">
+                <a:solidFill>
+                  <a:srgbClr val="0064D9"/>
+                </a:solidFill>
+                <a:latin typeface="Courier New" pitchFamily="34" charset="0"/>
+                <a:ea typeface="Courier New" pitchFamily="34" charset="-122"/>
+                <a:cs typeface="Courier New" pitchFamily="34" charset="-120"/>
+              </a:rPr>
+              <a:t>YY</a:t>
+            </a:r>
+            <a:r>
+              <a:rPr lang="en-US" sz="1200" dirty="0">
+                <a:solidFill>
+                  <a:srgbClr val="556B82"/>
+                </a:solidFill>
+              </a:rPr>
+              <a:t> nunca colidem com os entregues pela SAP.</a:t>
             </a:r>
             <a:endParaRPr lang="en-US" sz="1400" dirty="0"/>
           </a:p>
